--- a/Magist_Ppt.pptx
+++ b/Magist_Ppt.pptx
@@ -255,8 +255,11 @@
     </a:lvl9pPr>
   </p:defaultTextStyle>
   <p:extLst>
+    <p:ext uri="{EFAFB233-063F-42B5-8137-9DF3F51BA10A}">
+      <p15:sldGuideLst xmlns:p15="http://schemas.microsoft.com/office/powerpoint/2012/main"/>
+    </p:ext>
     <p:ext uri="GoogleSlidesCustomDataVersion2">
-      <go:slidesCustomData xmlns:go="http://customooxmlschemas.google.com/" xmlns:ahyp="http://schemas.microsoft.com/office/drawing/2018/hyperlinkcolor" xmlns:p15="http://schemas.microsoft.com/office/powerpoint/2012/main" xmlns:p14="http://schemas.microsoft.com/office/powerpoint/2010/main" xmlns:com="http://schemas.openxmlformats.org/drawingml/2006/compatibility" xmlns:pvml="urn:schemas-microsoft-com:office:powerpoint" xmlns:v="urn:schemas-microsoft-com:vml" xmlns:o="urn:schemas-microsoft-com:office:office" xmlns:dgm="http://schemas.openxmlformats.org/drawingml/2006/diagram" xmlns:c="http://schemas.openxmlformats.org/drawingml/2006/chart" xmlns:mv="urn:schemas-microsoft-com:mac:vml" xmlns:mc="http://schemas.openxmlformats.org/markup-compatibility/2006" xmlns="" r:id="rId13" roundtripDataSignature="AMtx7mhoIPWCAdZ/yd94TkxJAn/f9rY8rw=="/>
+      <go:slidesCustomData xmlns="" xmlns:mc="http://schemas.openxmlformats.org/markup-compatibility/2006" xmlns:mv="urn:schemas-microsoft-com:mac:vml" xmlns:c="http://schemas.openxmlformats.org/drawingml/2006/chart" xmlns:dgm="http://schemas.openxmlformats.org/drawingml/2006/diagram" xmlns:o="urn:schemas-microsoft-com:office:office" xmlns:v="urn:schemas-microsoft-com:vml" xmlns:pvml="urn:schemas-microsoft-com:office:powerpoint" xmlns:com="http://schemas.openxmlformats.org/drawingml/2006/compatibility" xmlns:p14="http://schemas.microsoft.com/office/powerpoint/2010/main" xmlns:p15="http://schemas.microsoft.com/office/powerpoint/2012/main" xmlns:ahyp="http://schemas.microsoft.com/office/drawing/2018/hyperlinkcolor" xmlns:go="http://customooxmlschemas.google.com/" r:id="rId13" roundtripDataSignature="AMtx7mhoIPWCAdZ/yd94TkxJAn/f9rY8rw=="/>
     </p:ext>
   </p:extLst>
 </p:presentation>
@@ -1082,8 +1085,8 @@
         </p:nvSpPr>
         <p:spPr>
           <a:xfrm>
-            <a:off x="1143225" y="685800"/>
-            <a:ext cx="4572225" cy="3429000"/>
+            <a:off x="381000" y="685800"/>
+            <a:ext cx="6096000" cy="3429000"/>
           </a:xfrm>
           <a:custGeom>
             <a:avLst/>
@@ -1186,8 +1189,8 @@
         </p:nvSpPr>
         <p:spPr>
           <a:xfrm>
-            <a:off x="1143225" y="685800"/>
-            <a:ext cx="4572225" cy="3429000"/>
+            <a:off x="381000" y="685800"/>
+            <a:ext cx="6096000" cy="3429000"/>
           </a:xfrm>
           <a:custGeom>
             <a:avLst/>
@@ -12579,8 +12582,8 @@
         </p:nvSpPr>
         <p:spPr>
           <a:xfrm>
-            <a:off x="839788" y="365125"/>
-            <a:ext cx="10515600" cy="1325563"/>
+            <a:off x="3675353" y="334645"/>
+            <a:ext cx="8090852" cy="1006475"/>
           </a:xfrm>
           <a:prstGeom prst="rect">
             <a:avLst/>
@@ -12614,10 +12617,10 @@
               <a:buNone/>
             </a:pPr>
             <a:r>
-              <a:rPr lang="en-US" b="1" u="sng"/>
+              <a:rPr lang="en-US" b="1" u="sng" dirty="0"/>
               <a:t>Delivery Status Analysis</a:t>
             </a:r>
-            <a:endParaRPr b="1" u="sng"/>
+            <a:endParaRPr b="1" u="sng" dirty="0"/>
           </a:p>
         </p:txBody>
       </p:sp>
@@ -12633,7 +12636,7 @@
         </p:nvSpPr>
         <p:spPr>
           <a:xfrm>
-            <a:off x="6427694" y="2167871"/>
+            <a:off x="4944334" y="1791951"/>
             <a:ext cx="5764306" cy="3984345"/>
           </a:xfrm>
           <a:prstGeom prst="rect">
@@ -12666,7 +12669,7 @@
               <a:buSzPts val="2400"/>
               <a:buNone/>
             </a:pPr>
-            <a:endParaRPr sz="2400"/>
+            <a:endParaRPr sz="2400" dirty="0"/>
           </a:p>
           <a:p>
             <a:pPr marL="228600" lvl="0" indent="-76200" algn="l" rtl="0">
@@ -12685,7 +12688,7 @@
               <a:buSzPts val="2400"/>
               <a:buNone/>
             </a:pPr>
-            <a:endParaRPr sz="2400"/>
+            <a:endParaRPr sz="2400" dirty="0"/>
           </a:p>
           <a:p>
             <a:pPr marL="228600" lvl="0" indent="-228600" algn="l" rtl="0">
@@ -12705,18 +12708,22 @@
               <a:buChar char="•"/>
             </a:pPr>
             <a:r>
-              <a:rPr lang="en-US" sz="2400"/>
+              <a:rPr lang="en-US" sz="2400" dirty="0"/>
               <a:t>Majority of orders are delivered </a:t>
             </a:r>
             <a:r>
-              <a:rPr lang="en-US" sz="2400" b="1"/>
-              <a:t>On_Time </a:t>
+              <a:rPr lang="en-US" sz="2400" b="1" dirty="0" err="1"/>
+              <a:t>On_Time</a:t>
             </a:r>
             <a:r>
-              <a:rPr lang="en-US" sz="2400"/>
+              <a:rPr lang="en-US" sz="2400" b="1" dirty="0"/>
+              <a:t> </a:t>
+            </a:r>
+            <a:r>
+              <a:rPr lang="en-US" sz="2400" dirty="0"/>
               <a:t>.</a:t>
             </a:r>
-            <a:endParaRPr/>
+            <a:endParaRPr dirty="0"/>
           </a:p>
           <a:p>
             <a:pPr marL="228600" lvl="0" indent="-228600" algn="l" rtl="0">
@@ -12736,10 +12743,10 @@
               <a:buChar char="•"/>
             </a:pPr>
             <a:r>
-              <a:rPr lang="en-US" sz="2400"/>
+              <a:rPr lang="en-US" sz="2400" dirty="0"/>
               <a:t>The delay rate is relatively low.</a:t>
             </a:r>
-            <a:endParaRPr/>
+            <a:endParaRPr dirty="0"/>
           </a:p>
           <a:p>
             <a:pPr marL="228600" lvl="0" indent="-228600" algn="l" rtl="0">
@@ -12759,37 +12766,22 @@
               <a:buChar char="•"/>
             </a:pPr>
             <a:r>
-              <a:rPr lang="en-US" sz="2400"/>
-              <a:t>Unknown delivery indicates missing or incomplete tracking data.</a:t>
-            </a:r>
-            <a:endParaRPr/>
-          </a:p>
-          <a:p>
-            <a:pPr marL="228600" lvl="0" indent="-228600" algn="l" rtl="0">
-              <a:lnSpc>
-                <a:spcPct val="90000"/>
-              </a:lnSpc>
-              <a:spcBef>
-                <a:spcPts val="1000"/>
-              </a:spcBef>
-              <a:spcAft>
-                <a:spcPts val="0"/>
-              </a:spcAft>
-              <a:buClr>
-                <a:schemeClr val="dk1"/>
-              </a:buClr>
-              <a:buSzPts val="2400"/>
-              <a:buChar char="•"/>
-            </a:pPr>
-            <a:r>
-              <a:rPr lang="en-US" sz="2400"/>
-              <a:t>This indicates that Magist has reliable logistics and delivery performance</a:t>
+              <a:rPr lang="en-US" sz="2400" dirty="0"/>
+              <a:t>This indicates that </a:t>
             </a:r>
             <a:r>
-              <a:rPr lang="en-US"/>
+              <a:rPr lang="en-US" sz="2400" dirty="0" err="1"/>
+              <a:t>Magist</a:t>
+            </a:r>
+            <a:r>
+              <a:rPr lang="en-US" sz="2400" dirty="0"/>
+              <a:t> has reliable logistics and delivery performance</a:t>
+            </a:r>
+            <a:r>
+              <a:rPr lang="en-US" dirty="0"/>
               <a:t>.</a:t>
             </a:r>
-            <a:endParaRPr/>
+            <a:endParaRPr dirty="0"/>
           </a:p>
           <a:p>
             <a:pPr marL="0" lvl="0" indent="0" algn="l" rtl="0">
@@ -12808,7 +12800,7 @@
               <a:buSzPts val="2800"/>
               <a:buNone/>
             </a:pPr>
-            <a:endParaRPr/>
+            <a:endParaRPr dirty="0"/>
           </a:p>
           <a:p>
             <a:pPr marL="0" lvl="0" indent="0" algn="l" rtl="0">
@@ -12827,39 +12819,38 @@
               <a:buSzPts val="2800"/>
               <a:buNone/>
             </a:pPr>
-            <a:endParaRPr/>
+            <a:endParaRPr dirty="0"/>
           </a:p>
         </p:txBody>
       </p:sp>
       <p:pic>
         <p:nvPicPr>
-          <p:cNvPr id="110" name="Google Shape;110;p4"/>
-          <p:cNvPicPr preferRelativeResize="0">
-            <a:picLocks noGrp="1"/>
+          <p:cNvPr id="11" name="Picture 10">
+            <a:extLst>
+              <a:ext uri="{FF2B5EF4-FFF2-40B4-BE49-F238E27FC236}">
+                <a16:creationId xmlns:a16="http://schemas.microsoft.com/office/drawing/2014/main" id="{964892B3-547D-5719-97E7-D9B6FB37D607}"/>
+              </a:ext>
+            </a:extLst>
+          </p:cNvPr>
+          <p:cNvPicPr>
+            <a:picLocks noChangeAspect="1"/>
           </p:cNvPicPr>
-          <p:nvPr>
-            <p:ph type="body" idx="2"/>
-          </p:nvPr>
+          <p:nvPr/>
         </p:nvPicPr>
-        <p:blipFill rotWithShape="1">
-          <a:blip r:embed="rId3">
-            <a:alphaModFix/>
-          </a:blip>
-          <a:srcRect/>
-          <a:stretch/>
+        <p:blipFill>
+          <a:blip r:embed="rId3"/>
+          <a:stretch>
+            <a:fillRect/>
+          </a:stretch>
         </p:blipFill>
         <p:spPr>
           <a:xfrm>
-            <a:off x="462012" y="2378141"/>
-            <a:ext cx="5844900" cy="3352800"/>
+            <a:off x="649301" y="513080"/>
+            <a:ext cx="2489850" cy="5831840"/>
           </a:xfrm>
           <a:prstGeom prst="rect">
             <a:avLst/>
           </a:prstGeom>
-          <a:noFill/>
-          <a:ln>
-            <a:noFill/>
-          </a:ln>
         </p:spPr>
       </p:pic>
     </p:spTree>
@@ -12960,8 +12951,8 @@
         </p:blipFill>
         <p:spPr>
           <a:xfrm>
-            <a:off x="367512" y="2034223"/>
-            <a:ext cx="11457000" cy="2913600"/>
+            <a:off x="365760" y="1818640"/>
+            <a:ext cx="11551920" cy="3149600"/>
           </a:xfrm>
           <a:prstGeom prst="rect">
             <a:avLst/>
